--- a/downloads/Ananias_and_Sapphira_Lesson_Slides.pptx
+++ b/downloads/Ananias_and_Sapphira_Lesson_Slides.pptx
@@ -2314,8 +2314,8 @@
         </p:nvSpPr>
         <p:spPr>
           <a:xfrm>
-            <a:off x="914400" y="1325880"/>
-            <a:ext cx="10360152" cy="1005840"/>
+            <a:off x="914400" y="1207008"/>
+            <a:ext cx="10360152" cy="960120"/>
           </a:xfrm>
           <a:prstGeom prst="rect">
             <a:avLst/>
@@ -2353,8 +2353,8 @@
         </p:nvSpPr>
         <p:spPr>
           <a:xfrm>
-            <a:off x="914400" y="2377440"/>
-            <a:ext cx="10360152" cy="731520"/>
+            <a:off x="914400" y="2212848"/>
+            <a:ext cx="10360152" cy="640080"/>
           </a:xfrm>
           <a:prstGeom prst="rect">
             <a:avLst/>
@@ -2392,8 +2392,8 @@
         </p:nvSpPr>
         <p:spPr>
           <a:xfrm>
-            <a:off x="914400" y="3108960"/>
-            <a:ext cx="10360152" cy="457200"/>
+            <a:off x="914400" y="2852928"/>
+            <a:ext cx="10360152" cy="384048"/>
           </a:xfrm>
           <a:prstGeom prst="rect">
             <a:avLst/>
@@ -2409,7 +2409,46 @@
               <a:buNone/>
             </a:pPr>
             <a:r>
-              <a:rPr lang="en-US" sz="1800" dirty="0">
+              <a:rPr lang="en-US" sz="2000" b="1" dirty="0">
+                <a:solidFill>
+                  <a:srgbClr val="5A3310"/>
+                </a:solidFill>
+                <a:latin typeface="Cambria" pitchFamily="34" charset="0"/>
+                <a:ea typeface="Cambria" pitchFamily="34" charset="-122"/>
+                <a:cs typeface="Cambria" pitchFamily="34" charset="-120"/>
+              </a:rPr>
+              <a:t>by Dn. Yonnas</a:t>
+            </a:r>
+            <a:endParaRPr lang="en-US" sz="2000" dirty="0"/>
+          </a:p>
+        </p:txBody>
+      </p:sp>
+      <p:sp>
+        <p:nvSpPr>
+          <p:cNvPr id="5" name="Text 3"/>
+          <p:cNvSpPr/>
+          <p:nvPr/>
+        </p:nvSpPr>
+        <p:spPr>
+          <a:xfrm>
+            <a:off x="914400" y="3255264"/>
+            <a:ext cx="10360152" cy="384048"/>
+          </a:xfrm>
+          <a:prstGeom prst="rect">
+            <a:avLst/>
+          </a:prstGeom>
+          <a:noFill/>
+          <a:ln/>
+        </p:spPr>
+        <p:txBody>
+          <a:bodyPr wrap="square" rtlCol="0" anchor="ctr"/>
+          <a:lstStyle/>
+          <a:p>
+            <a:pPr algn="ctr" indent="0" marL="0">
+              <a:buNone/>
+            </a:pPr>
+            <a:r>
+              <a:rPr lang="en-US" sz="1700" dirty="0">
                 <a:solidFill>
                   <a:srgbClr val="33240F"/>
                 </a:solidFill>
@@ -2419,24 +2458,24 @@
               </a:rPr>
               <a:t>An in-depth reading of Acts 5:1–11</a:t>
             </a:r>
-            <a:endParaRPr lang="en-US" sz="1800" dirty="0"/>
-          </a:p>
-        </p:txBody>
-      </p:sp>
-      <p:sp>
-        <p:nvSpPr>
-          <p:cNvPr id="5" name="Shape 3"/>
-          <p:cNvSpPr/>
-          <p:nvPr/>
-        </p:nvSpPr>
-        <p:spPr>
-          <a:xfrm>
-            <a:off x="2468880" y="3767328"/>
-            <a:ext cx="7251192" cy="914400"/>
+            <a:endParaRPr lang="en-US" sz="1700" dirty="0"/>
+          </a:p>
+        </p:txBody>
+      </p:sp>
+      <p:sp>
+        <p:nvSpPr>
+          <p:cNvPr id="6" name="Shape 4"/>
+          <p:cNvSpPr/>
+          <p:nvPr/>
+        </p:nvSpPr>
+        <p:spPr>
+          <a:xfrm>
+            <a:off x="2743200" y="3794760"/>
+            <a:ext cx="6702552" cy="868680"/>
           </a:xfrm>
           <a:prstGeom prst="roundRect">
             <a:avLst>
-              <a:gd name="adj" fmla="val 13000"/>
+              <a:gd name="adj" fmla="val 13684"/>
             </a:avLst>
           </a:prstGeom>
           <a:solidFill>
@@ -2461,18 +2500,18 @@
       </p:sp>
       <p:sp>
         <p:nvSpPr>
-          <p:cNvPr id="6" name="Shape 4"/>
-          <p:cNvSpPr/>
-          <p:nvPr/>
-        </p:nvSpPr>
-        <p:spPr>
-          <a:xfrm>
-            <a:off x="2560320" y="3858768"/>
-            <a:ext cx="7068312" cy="731520"/>
+          <p:cNvPr id="7" name="Shape 5"/>
+          <p:cNvSpPr/>
+          <p:nvPr/>
+        </p:nvSpPr>
+        <p:spPr>
+          <a:xfrm>
+            <a:off x="2834640" y="3886200"/>
+            <a:ext cx="6519672" cy="685800"/>
           </a:xfrm>
           <a:prstGeom prst="roundRect">
             <a:avLst>
-              <a:gd name="adj" fmla="val 12500"/>
+              <a:gd name="adj" fmla="val 13333"/>
             </a:avLst>
           </a:prstGeom>
           <a:solidFill>
@@ -2490,14 +2529,14 @@
       </p:sp>
       <p:sp>
         <p:nvSpPr>
-          <p:cNvPr id="7" name="Text 5"/>
-          <p:cNvSpPr/>
-          <p:nvPr/>
-        </p:nvSpPr>
-        <p:spPr>
-          <a:xfrm>
-            <a:off x="2651760" y="3858768"/>
-            <a:ext cx="6885432" cy="731520"/>
+          <p:cNvPr id="8" name="Text 6"/>
+          <p:cNvSpPr/>
+          <p:nvPr/>
+        </p:nvSpPr>
+        <p:spPr>
+          <a:xfrm>
+            <a:off x="2926080" y="3877056"/>
+            <a:ext cx="6336792" cy="731520"/>
           </a:xfrm>
           <a:prstGeom prst="rect">
             <a:avLst/>
@@ -2627,8 +2666,8 @@
         </p:nvSpPr>
         <p:spPr>
           <a:xfrm>
-            <a:off x="914400" y="1371600"/>
-            <a:ext cx="10360152" cy="1143000"/>
+            <a:off x="1353312" y="1371600"/>
+            <a:ext cx="9482328" cy="1143000"/>
           </a:xfrm>
           <a:prstGeom prst="roundRect">
             <a:avLst>
@@ -2663,8 +2702,8 @@
         </p:nvSpPr>
         <p:spPr>
           <a:xfrm>
-            <a:off x="1005840" y="1463040"/>
-            <a:ext cx="10177272" cy="960120"/>
+            <a:off x="1444752" y="1463040"/>
+            <a:ext cx="9299448" cy="960120"/>
           </a:xfrm>
           <a:prstGeom prst="roundRect">
             <a:avLst>
@@ -2692,8 +2731,8 @@
         </p:nvSpPr>
         <p:spPr>
           <a:xfrm>
-            <a:off x="1280160" y="1463040"/>
-            <a:ext cx="9628632" cy="960120"/>
+            <a:off x="1719072" y="1463040"/>
+            <a:ext cx="8750808" cy="960120"/>
           </a:xfrm>
           <a:prstGeom prst="rect">
             <a:avLst/>
@@ -2779,8 +2818,8 @@
         </p:nvSpPr>
         <p:spPr>
           <a:xfrm>
-            <a:off x="640080" y="2697480"/>
-            <a:ext cx="10908792" cy="1874520"/>
+            <a:off x="1078992" y="2697480"/>
+            <a:ext cx="10030968" cy="1874520"/>
           </a:xfrm>
           <a:prstGeom prst="roundRect">
             <a:avLst>
@@ -2815,8 +2854,8 @@
         </p:nvSpPr>
         <p:spPr>
           <a:xfrm>
-            <a:off x="731520" y="2788920"/>
-            <a:ext cx="10725912" cy="1691640"/>
+            <a:off x="1170432" y="2788920"/>
+            <a:ext cx="9848088" cy="1691640"/>
           </a:xfrm>
           <a:prstGeom prst="roundRect">
             <a:avLst>
@@ -2844,7 +2883,7 @@
         </p:nvSpPr>
         <p:spPr>
           <a:xfrm rot="2700000">
-            <a:off x="978408" y="3078099"/>
+            <a:off x="1417320" y="3078099"/>
             <a:ext cx="146304" cy="146304"/>
           </a:xfrm>
           <a:prstGeom prst="rect">
@@ -2869,8 +2908,8 @@
         </p:nvSpPr>
         <p:spPr>
           <a:xfrm>
-            <a:off x="1389888" y="2990088"/>
-            <a:ext cx="9811512" cy="322326"/>
+            <a:off x="1828800" y="2990088"/>
+            <a:ext cx="8933688" cy="322326"/>
           </a:xfrm>
           <a:prstGeom prst="rect">
             <a:avLst/>
@@ -2950,7 +2989,7 @@
         </p:nvSpPr>
         <p:spPr>
           <a:xfrm rot="2700000">
-            <a:off x="978408" y="3400425"/>
+            <a:off x="1417320" y="3400425"/>
             <a:ext cx="146304" cy="146304"/>
           </a:xfrm>
           <a:prstGeom prst="rect">
@@ -2975,8 +3014,8 @@
         </p:nvSpPr>
         <p:spPr>
           <a:xfrm>
-            <a:off x="1389888" y="3312414"/>
-            <a:ext cx="9811512" cy="322326"/>
+            <a:off x="1828800" y="3312414"/>
+            <a:ext cx="8933688" cy="322326"/>
           </a:xfrm>
           <a:prstGeom prst="rect">
             <a:avLst/>
@@ -3042,7 +3081,7 @@
         </p:nvSpPr>
         <p:spPr>
           <a:xfrm rot="2700000">
-            <a:off x="978408" y="3722751"/>
+            <a:off x="1417320" y="3722751"/>
             <a:ext cx="146304" cy="146304"/>
           </a:xfrm>
           <a:prstGeom prst="rect">
@@ -3067,8 +3106,8 @@
         </p:nvSpPr>
         <p:spPr>
           <a:xfrm>
-            <a:off x="1389888" y="3634740"/>
-            <a:ext cx="9811512" cy="322326"/>
+            <a:off x="1828800" y="3634740"/>
+            <a:ext cx="8933688" cy="322326"/>
           </a:xfrm>
           <a:prstGeom prst="rect">
             <a:avLst/>
@@ -3134,7 +3173,7 @@
         </p:nvSpPr>
         <p:spPr>
           <a:xfrm rot="2700000">
-            <a:off x="978408" y="4045077"/>
+            <a:off x="1417320" y="4045077"/>
             <a:ext cx="146304" cy="146304"/>
           </a:xfrm>
           <a:prstGeom prst="rect">
@@ -3159,8 +3198,8 @@
         </p:nvSpPr>
         <p:spPr>
           <a:xfrm>
-            <a:off x="1389888" y="3957066"/>
-            <a:ext cx="9811512" cy="322326"/>
+            <a:off x="1828800" y="3957066"/>
+            <a:ext cx="8933688" cy="322326"/>
           </a:xfrm>
           <a:prstGeom prst="rect">
             <a:avLst/>
@@ -3304,8 +3343,8 @@
         </p:nvSpPr>
         <p:spPr>
           <a:xfrm>
-            <a:off x="640080" y="1554480"/>
-            <a:ext cx="10908792" cy="3017520"/>
+            <a:off x="1078992" y="1554480"/>
+            <a:ext cx="10030968" cy="3017520"/>
           </a:xfrm>
           <a:prstGeom prst="roundRect">
             <a:avLst>
@@ -3340,8 +3379,8 @@
         </p:nvSpPr>
         <p:spPr>
           <a:xfrm>
-            <a:off x="731520" y="1645920"/>
-            <a:ext cx="10725912" cy="2834640"/>
+            <a:off x="1170432" y="1645920"/>
+            <a:ext cx="9848088" cy="2834640"/>
           </a:xfrm>
           <a:prstGeom prst="roundRect">
             <a:avLst>
@@ -3369,7 +3408,7 @@
         </p:nvSpPr>
         <p:spPr>
           <a:xfrm rot="2700000">
-            <a:off x="978408" y="2077974"/>
+            <a:off x="1417320" y="2077974"/>
             <a:ext cx="146304" cy="146304"/>
           </a:xfrm>
           <a:prstGeom prst="rect">
@@ -3394,8 +3433,8 @@
         </p:nvSpPr>
         <p:spPr>
           <a:xfrm>
-            <a:off x="1389888" y="1847088"/>
-            <a:ext cx="9811512" cy="608076"/>
+            <a:off x="1828800" y="1847088"/>
+            <a:ext cx="8933688" cy="608076"/>
           </a:xfrm>
           <a:prstGeom prst="rect">
             <a:avLst/>
@@ -3461,7 +3500,7 @@
         </p:nvSpPr>
         <p:spPr>
           <a:xfrm rot="2700000">
-            <a:off x="978408" y="2686050"/>
+            <a:off x="1417320" y="2686050"/>
             <a:ext cx="146304" cy="146304"/>
           </a:xfrm>
           <a:prstGeom prst="rect">
@@ -3486,8 +3525,8 @@
         </p:nvSpPr>
         <p:spPr>
           <a:xfrm>
-            <a:off x="1389888" y="2455164"/>
-            <a:ext cx="9811512" cy="608076"/>
+            <a:off x="1828800" y="2455164"/>
+            <a:ext cx="8933688" cy="608076"/>
           </a:xfrm>
           <a:prstGeom prst="rect">
             <a:avLst/>
@@ -3567,7 +3606,7 @@
         </p:nvSpPr>
         <p:spPr>
           <a:xfrm rot="2700000">
-            <a:off x="978408" y="3294126"/>
+            <a:off x="1417320" y="3294126"/>
             <a:ext cx="146304" cy="146304"/>
           </a:xfrm>
           <a:prstGeom prst="rect">
@@ -3592,8 +3631,8 @@
         </p:nvSpPr>
         <p:spPr>
           <a:xfrm>
-            <a:off x="1389888" y="3063240"/>
-            <a:ext cx="9811512" cy="608076"/>
+            <a:off x="1828800" y="3063240"/>
+            <a:ext cx="8933688" cy="608076"/>
           </a:xfrm>
           <a:prstGeom prst="rect">
             <a:avLst/>
@@ -3659,7 +3698,7 @@
         </p:nvSpPr>
         <p:spPr>
           <a:xfrm rot="2700000">
-            <a:off x="978408" y="3902202"/>
+            <a:off x="1417320" y="3902202"/>
             <a:ext cx="146304" cy="146304"/>
           </a:xfrm>
           <a:prstGeom prst="rect">
@@ -3684,8 +3723,8 @@
         </p:nvSpPr>
         <p:spPr>
           <a:xfrm>
-            <a:off x="1389888" y="3671316"/>
-            <a:ext cx="9811512" cy="608076"/>
+            <a:off x="1828800" y="3671316"/>
+            <a:ext cx="8933688" cy="608076"/>
           </a:xfrm>
           <a:prstGeom prst="rect">
             <a:avLst/>
@@ -3857,8 +3896,8 @@
         </p:nvSpPr>
         <p:spPr>
           <a:xfrm>
-            <a:off x="914400" y="1371600"/>
-            <a:ext cx="10360152" cy="960120"/>
+            <a:off x="1353312" y="1371600"/>
+            <a:ext cx="9482328" cy="960120"/>
           </a:xfrm>
           <a:prstGeom prst="roundRect">
             <a:avLst>
@@ -3893,8 +3932,8 @@
         </p:nvSpPr>
         <p:spPr>
           <a:xfrm>
-            <a:off x="1005840" y="1463040"/>
-            <a:ext cx="10177272" cy="777240"/>
+            <a:off x="1444752" y="1463040"/>
+            <a:ext cx="9299448" cy="777240"/>
           </a:xfrm>
           <a:prstGeom prst="roundRect">
             <a:avLst>
@@ -3922,8 +3961,8 @@
         </p:nvSpPr>
         <p:spPr>
           <a:xfrm>
-            <a:off x="1280160" y="1517904"/>
-            <a:ext cx="9628632" cy="667512"/>
+            <a:off x="1719072" y="1517904"/>
+            <a:ext cx="8750808" cy="667512"/>
           </a:xfrm>
           <a:prstGeom prst="rect">
             <a:avLst/>
@@ -3981,8 +4020,8 @@
         </p:nvSpPr>
         <p:spPr>
           <a:xfrm>
-            <a:off x="640080" y="2542032"/>
-            <a:ext cx="10908792" cy="1965960"/>
+            <a:off x="1078992" y="2542032"/>
+            <a:ext cx="10030968" cy="1965960"/>
           </a:xfrm>
           <a:prstGeom prst="roundRect">
             <a:avLst>
@@ -4017,8 +4056,8 @@
         </p:nvSpPr>
         <p:spPr>
           <a:xfrm>
-            <a:off x="731520" y="2633472"/>
-            <a:ext cx="10725912" cy="1783080"/>
+            <a:off x="1170432" y="2633472"/>
+            <a:ext cx="9848088" cy="1783080"/>
           </a:xfrm>
           <a:prstGeom prst="roundRect">
             <a:avLst>
@@ -4046,7 +4085,7 @@
         </p:nvSpPr>
         <p:spPr>
           <a:xfrm rot="2700000">
-            <a:off x="978408" y="2899562"/>
+            <a:off x="1417320" y="2899562"/>
             <a:ext cx="146304" cy="146304"/>
           </a:xfrm>
           <a:prstGeom prst="rect">
@@ -4071,8 +4110,8 @@
         </p:nvSpPr>
         <p:spPr>
           <a:xfrm>
-            <a:off x="1389888" y="2834640"/>
-            <a:ext cx="9811512" cy="276149"/>
+            <a:off x="1828800" y="2834640"/>
+            <a:ext cx="8933688" cy="276149"/>
           </a:xfrm>
           <a:prstGeom prst="rect">
             <a:avLst/>
@@ -4138,7 +4177,7 @@
         </p:nvSpPr>
         <p:spPr>
           <a:xfrm rot="2700000">
-            <a:off x="978408" y="3175711"/>
+            <a:off x="1417320" y="3175711"/>
             <a:ext cx="146304" cy="146304"/>
           </a:xfrm>
           <a:prstGeom prst="rect">
@@ -4163,8 +4202,8 @@
         </p:nvSpPr>
         <p:spPr>
           <a:xfrm>
-            <a:off x="1389888" y="3110789"/>
-            <a:ext cx="9811512" cy="276149"/>
+            <a:off x="1828800" y="3110789"/>
+            <a:ext cx="8933688" cy="276149"/>
           </a:xfrm>
           <a:prstGeom prst="rect">
             <a:avLst/>
@@ -4216,7 +4255,7 @@
         </p:nvSpPr>
         <p:spPr>
           <a:xfrm rot="2700000">
-            <a:off x="978408" y="3451860"/>
+            <a:off x="1417320" y="3451860"/>
             <a:ext cx="146304" cy="146304"/>
           </a:xfrm>
           <a:prstGeom prst="rect">
@@ -4241,8 +4280,8 @@
         </p:nvSpPr>
         <p:spPr>
           <a:xfrm>
-            <a:off x="1389888" y="3386938"/>
-            <a:ext cx="9811512" cy="276149"/>
+            <a:off x="1828800" y="3386938"/>
+            <a:ext cx="8933688" cy="276149"/>
           </a:xfrm>
           <a:prstGeom prst="rect">
             <a:avLst/>
@@ -4308,7 +4347,7 @@
         </p:nvSpPr>
         <p:spPr>
           <a:xfrm rot="2700000">
-            <a:off x="978408" y="3728009"/>
+            <a:off x="1417320" y="3728009"/>
             <a:ext cx="146304" cy="146304"/>
           </a:xfrm>
           <a:prstGeom prst="rect">
@@ -4333,8 +4372,8 @@
         </p:nvSpPr>
         <p:spPr>
           <a:xfrm>
-            <a:off x="1389888" y="3663086"/>
-            <a:ext cx="9811512" cy="276149"/>
+            <a:off x="1828800" y="3663086"/>
+            <a:ext cx="8933688" cy="276149"/>
           </a:xfrm>
           <a:prstGeom prst="rect">
             <a:avLst/>
@@ -4386,7 +4425,7 @@
         </p:nvSpPr>
         <p:spPr>
           <a:xfrm rot="2700000">
-            <a:off x="978408" y="4004158"/>
+            <a:off x="1417320" y="4004158"/>
             <a:ext cx="146304" cy="146304"/>
           </a:xfrm>
           <a:prstGeom prst="rect">
@@ -4411,8 +4450,8 @@
         </p:nvSpPr>
         <p:spPr>
           <a:xfrm>
-            <a:off x="1389888" y="3939235"/>
-            <a:ext cx="9811512" cy="276149"/>
+            <a:off x="1828800" y="3939235"/>
+            <a:ext cx="8933688" cy="276149"/>
           </a:xfrm>
           <a:prstGeom prst="rect">
             <a:avLst/>
@@ -4598,8 +4637,8 @@
         </p:nvSpPr>
         <p:spPr>
           <a:xfrm>
-            <a:off x="640080" y="1463040"/>
-            <a:ext cx="10908792" cy="1810512"/>
+            <a:off x="1078992" y="1463040"/>
+            <a:ext cx="10030968" cy="1810512"/>
           </a:xfrm>
           <a:prstGeom prst="roundRect">
             <a:avLst>
@@ -4634,8 +4673,8 @@
         </p:nvSpPr>
         <p:spPr>
           <a:xfrm>
-            <a:off x="731520" y="1554480"/>
-            <a:ext cx="10725912" cy="1627632"/>
+            <a:off x="1170432" y="1554480"/>
+            <a:ext cx="9848088" cy="1627632"/>
           </a:xfrm>
           <a:prstGeom prst="roundRect">
             <a:avLst>
@@ -4663,7 +4702,7 @@
         </p:nvSpPr>
         <p:spPr>
           <a:xfrm rot="2700000">
-            <a:off x="978408" y="1835658"/>
+            <a:off x="1417320" y="1835658"/>
             <a:ext cx="146304" cy="146304"/>
           </a:xfrm>
           <a:prstGeom prst="rect">
@@ -4688,8 +4727,8 @@
         </p:nvSpPr>
         <p:spPr>
           <a:xfrm>
-            <a:off x="1389888" y="1755648"/>
-            <a:ext cx="9811512" cy="306324"/>
+            <a:off x="1828800" y="1755648"/>
+            <a:ext cx="8933688" cy="306324"/>
           </a:xfrm>
           <a:prstGeom prst="rect">
             <a:avLst/>
@@ -4769,7 +4808,7 @@
         </p:nvSpPr>
         <p:spPr>
           <a:xfrm rot="2700000">
-            <a:off x="978408" y="2141982"/>
+            <a:off x="1417320" y="2141982"/>
             <a:ext cx="146304" cy="146304"/>
           </a:xfrm>
           <a:prstGeom prst="rect">
@@ -4794,8 +4833,8 @@
         </p:nvSpPr>
         <p:spPr>
           <a:xfrm>
-            <a:off x="1389888" y="2061972"/>
-            <a:ext cx="9811512" cy="306324"/>
+            <a:off x="1828800" y="2061972"/>
+            <a:ext cx="8933688" cy="306324"/>
           </a:xfrm>
           <a:prstGeom prst="rect">
             <a:avLst/>
@@ -4861,7 +4900,7 @@
         </p:nvSpPr>
         <p:spPr>
           <a:xfrm rot="2700000">
-            <a:off x="978408" y="2448306"/>
+            <a:off x="1417320" y="2448306"/>
             <a:ext cx="146304" cy="146304"/>
           </a:xfrm>
           <a:prstGeom prst="rect">
@@ -4886,8 +4925,8 @@
         </p:nvSpPr>
         <p:spPr>
           <a:xfrm>
-            <a:off x="1389888" y="2368296"/>
-            <a:ext cx="9811512" cy="306324"/>
+            <a:off x="1828800" y="2368296"/>
+            <a:ext cx="8933688" cy="306324"/>
           </a:xfrm>
           <a:prstGeom prst="rect">
             <a:avLst/>
@@ -4939,7 +4978,7 @@
         </p:nvSpPr>
         <p:spPr>
           <a:xfrm rot="2700000">
-            <a:off x="978408" y="2754630"/>
+            <a:off x="1417320" y="2754630"/>
             <a:ext cx="146304" cy="146304"/>
           </a:xfrm>
           <a:prstGeom prst="rect">
@@ -4964,8 +5003,8 @@
         </p:nvSpPr>
         <p:spPr>
           <a:xfrm>
-            <a:off x="1389888" y="2674620"/>
-            <a:ext cx="9811512" cy="306324"/>
+            <a:off x="1828800" y="2674620"/>
+            <a:ext cx="8933688" cy="306324"/>
           </a:xfrm>
           <a:prstGeom prst="rect">
             <a:avLst/>
@@ -5045,8 +5084,8 @@
         </p:nvSpPr>
         <p:spPr>
           <a:xfrm>
-            <a:off x="914400" y="3493008"/>
-            <a:ext cx="10360152" cy="960120"/>
+            <a:off x="1353312" y="3493008"/>
+            <a:ext cx="9482328" cy="960120"/>
           </a:xfrm>
           <a:prstGeom prst="roundRect">
             <a:avLst>
@@ -5081,8 +5120,8 @@
         </p:nvSpPr>
         <p:spPr>
           <a:xfrm>
-            <a:off x="1005840" y="3584448"/>
-            <a:ext cx="10177272" cy="777240"/>
+            <a:off x="1444752" y="3584448"/>
+            <a:ext cx="9299448" cy="777240"/>
           </a:xfrm>
           <a:prstGeom prst="roundRect">
             <a:avLst>
@@ -5110,8 +5149,8 @@
         </p:nvSpPr>
         <p:spPr>
           <a:xfrm>
-            <a:off x="1280160" y="3639312"/>
-            <a:ext cx="9628632" cy="667512"/>
+            <a:off x="1719072" y="3639312"/>
+            <a:ext cx="8750808" cy="667512"/>
           </a:xfrm>
           <a:prstGeom prst="rect">
             <a:avLst/>
@@ -5247,8 +5286,8 @@
         </p:nvSpPr>
         <p:spPr>
           <a:xfrm>
-            <a:off x="640080" y="1463040"/>
-            <a:ext cx="10908792" cy="1810512"/>
+            <a:off x="1078992" y="1463040"/>
+            <a:ext cx="10030968" cy="1810512"/>
           </a:xfrm>
           <a:prstGeom prst="roundRect">
             <a:avLst>
@@ -5283,8 +5322,8 @@
         </p:nvSpPr>
         <p:spPr>
           <a:xfrm>
-            <a:off x="731520" y="1554480"/>
-            <a:ext cx="10725912" cy="1627632"/>
+            <a:off x="1170432" y="1554480"/>
+            <a:ext cx="9848088" cy="1627632"/>
           </a:xfrm>
           <a:prstGeom prst="roundRect">
             <a:avLst>
@@ -5312,7 +5351,7 @@
         </p:nvSpPr>
         <p:spPr>
           <a:xfrm rot="2700000">
-            <a:off x="978408" y="1835658"/>
+            <a:off x="1417320" y="1835658"/>
             <a:ext cx="146304" cy="146304"/>
           </a:xfrm>
           <a:prstGeom prst="rect">
@@ -5337,8 +5376,8 @@
         </p:nvSpPr>
         <p:spPr>
           <a:xfrm>
-            <a:off x="1389888" y="1755648"/>
-            <a:ext cx="9811512" cy="306324"/>
+            <a:off x="1828800" y="1755648"/>
+            <a:ext cx="8933688" cy="306324"/>
           </a:xfrm>
           <a:prstGeom prst="rect">
             <a:avLst/>
@@ -5404,7 +5443,7 @@
         </p:nvSpPr>
         <p:spPr>
           <a:xfrm rot="2700000">
-            <a:off x="978408" y="2141982"/>
+            <a:off x="1417320" y="2141982"/>
             <a:ext cx="146304" cy="146304"/>
           </a:xfrm>
           <a:prstGeom prst="rect">
@@ -5429,8 +5468,8 @@
         </p:nvSpPr>
         <p:spPr>
           <a:xfrm>
-            <a:off x="1389888" y="2061972"/>
-            <a:ext cx="9811512" cy="306324"/>
+            <a:off x="1828800" y="2061972"/>
+            <a:ext cx="8933688" cy="306324"/>
           </a:xfrm>
           <a:prstGeom prst="rect">
             <a:avLst/>
@@ -5524,7 +5563,7 @@
         </p:nvSpPr>
         <p:spPr>
           <a:xfrm rot="2700000">
-            <a:off x="978408" y="2448306"/>
+            <a:off x="1417320" y="2448306"/>
             <a:ext cx="146304" cy="146304"/>
           </a:xfrm>
           <a:prstGeom prst="rect">
@@ -5549,8 +5588,8 @@
         </p:nvSpPr>
         <p:spPr>
           <a:xfrm>
-            <a:off x="1389888" y="2368296"/>
-            <a:ext cx="9811512" cy="306324"/>
+            <a:off x="1828800" y="2368296"/>
+            <a:ext cx="8933688" cy="306324"/>
           </a:xfrm>
           <a:prstGeom prst="rect">
             <a:avLst/>
@@ -5616,7 +5655,7 @@
         </p:nvSpPr>
         <p:spPr>
           <a:xfrm rot="2700000">
-            <a:off x="978408" y="2754630"/>
+            <a:off x="1417320" y="2754630"/>
             <a:ext cx="146304" cy="146304"/>
           </a:xfrm>
           <a:prstGeom prst="rect">
@@ -5641,8 +5680,8 @@
         </p:nvSpPr>
         <p:spPr>
           <a:xfrm>
-            <a:off x="1389888" y="2674620"/>
-            <a:ext cx="9811512" cy="306324"/>
+            <a:off x="1828800" y="2674620"/>
+            <a:ext cx="8933688" cy="306324"/>
           </a:xfrm>
           <a:prstGeom prst="rect">
             <a:avLst/>
@@ -5708,8 +5747,8 @@
         </p:nvSpPr>
         <p:spPr>
           <a:xfrm>
-            <a:off x="914400" y="3493008"/>
-            <a:ext cx="10360152" cy="960120"/>
+            <a:off x="1353312" y="3493008"/>
+            <a:ext cx="9482328" cy="960120"/>
           </a:xfrm>
           <a:prstGeom prst="roundRect">
             <a:avLst>
@@ -5744,8 +5783,8 @@
         </p:nvSpPr>
         <p:spPr>
           <a:xfrm>
-            <a:off x="1005840" y="3584448"/>
-            <a:ext cx="10177272" cy="777240"/>
+            <a:off x="1444752" y="3584448"/>
+            <a:ext cx="9299448" cy="777240"/>
           </a:xfrm>
           <a:prstGeom prst="roundRect">
             <a:avLst>
@@ -5773,8 +5812,8 @@
         </p:nvSpPr>
         <p:spPr>
           <a:xfrm>
-            <a:off x="1280160" y="3566160"/>
-            <a:ext cx="9628632" cy="804672"/>
+            <a:off x="1719072" y="3566160"/>
+            <a:ext cx="8750808" cy="804672"/>
           </a:xfrm>
           <a:prstGeom prst="rect">
             <a:avLst/>
@@ -5904,8 +5943,8 @@
         </p:nvSpPr>
         <p:spPr>
           <a:xfrm>
-            <a:off x="640080" y="1481328"/>
-            <a:ext cx="10908792" cy="3154680"/>
+            <a:off x="1078992" y="1481328"/>
+            <a:ext cx="10030968" cy="3154680"/>
           </a:xfrm>
           <a:prstGeom prst="roundRect">
             <a:avLst>
@@ -5940,8 +5979,8 @@
         </p:nvSpPr>
         <p:spPr>
           <a:xfrm>
-            <a:off x="731520" y="1572768"/>
-            <a:ext cx="10725912" cy="2971800"/>
+            <a:off x="1170432" y="1572768"/>
+            <a:ext cx="9848088" cy="2971800"/>
           </a:xfrm>
           <a:prstGeom prst="roundRect">
             <a:avLst>
@@ -5969,7 +6008,7 @@
         </p:nvSpPr>
         <p:spPr>
           <a:xfrm>
-            <a:off x="1097280" y="1783080"/>
+            <a:off x="1536192" y="1783080"/>
             <a:ext cx="457200" cy="512064"/>
           </a:xfrm>
           <a:prstGeom prst="rect">
@@ -6008,8 +6047,8 @@
         </p:nvSpPr>
         <p:spPr>
           <a:xfrm>
-            <a:off x="1645920" y="1783080"/>
-            <a:ext cx="9445752" cy="512064"/>
+            <a:off x="2084832" y="1783080"/>
+            <a:ext cx="8567928" cy="512064"/>
           </a:xfrm>
           <a:prstGeom prst="rect">
             <a:avLst/>
@@ -6047,7 +6086,7 @@
         </p:nvSpPr>
         <p:spPr>
           <a:xfrm>
-            <a:off x="1097280" y="2295144"/>
+            <a:off x="1536192" y="2295144"/>
             <a:ext cx="457200" cy="512064"/>
           </a:xfrm>
           <a:prstGeom prst="rect">
@@ -6086,8 +6125,8 @@
         </p:nvSpPr>
         <p:spPr>
           <a:xfrm>
-            <a:off x="1645920" y="2295144"/>
-            <a:ext cx="9445752" cy="512064"/>
+            <a:off x="2084832" y="2295144"/>
+            <a:ext cx="8567928" cy="512064"/>
           </a:xfrm>
           <a:prstGeom prst="rect">
             <a:avLst/>
@@ -6125,7 +6164,7 @@
         </p:nvSpPr>
         <p:spPr>
           <a:xfrm>
-            <a:off x="1097280" y="2807208"/>
+            <a:off x="1536192" y="2807208"/>
             <a:ext cx="457200" cy="512064"/>
           </a:xfrm>
           <a:prstGeom prst="rect">
@@ -6164,8 +6203,8 @@
         </p:nvSpPr>
         <p:spPr>
           <a:xfrm>
-            <a:off x="1645920" y="2807208"/>
-            <a:ext cx="9445752" cy="512064"/>
+            <a:off x="2084832" y="2807208"/>
+            <a:ext cx="8567928" cy="512064"/>
           </a:xfrm>
           <a:prstGeom prst="rect">
             <a:avLst/>
@@ -6203,7 +6242,7 @@
         </p:nvSpPr>
         <p:spPr>
           <a:xfrm>
-            <a:off x="1097280" y="3319272"/>
+            <a:off x="1536192" y="3319272"/>
             <a:ext cx="457200" cy="512064"/>
           </a:xfrm>
           <a:prstGeom prst="rect">
@@ -6242,8 +6281,8 @@
         </p:nvSpPr>
         <p:spPr>
           <a:xfrm>
-            <a:off x="1645920" y="3319272"/>
-            <a:ext cx="9445752" cy="512064"/>
+            <a:off x="2084832" y="3319272"/>
+            <a:ext cx="8567928" cy="512064"/>
           </a:xfrm>
           <a:prstGeom prst="rect">
             <a:avLst/>
@@ -6281,7 +6320,7 @@
         </p:nvSpPr>
         <p:spPr>
           <a:xfrm>
-            <a:off x="1097280" y="3831336"/>
+            <a:off x="1536192" y="3831336"/>
             <a:ext cx="457200" cy="512064"/>
           </a:xfrm>
           <a:prstGeom prst="rect">
@@ -6320,8 +6359,8 @@
         </p:nvSpPr>
         <p:spPr>
           <a:xfrm>
-            <a:off x="1645920" y="3831336"/>
-            <a:ext cx="9445752" cy="512064"/>
+            <a:off x="2084832" y="3831336"/>
+            <a:ext cx="8567928" cy="512064"/>
           </a:xfrm>
           <a:prstGeom prst="rect">
             <a:avLst/>
@@ -6437,8 +6476,8 @@
         </p:nvSpPr>
         <p:spPr>
           <a:xfrm>
-            <a:off x="640080" y="1481328"/>
-            <a:ext cx="10908792" cy="3154680"/>
+            <a:off x="1078992" y="1481328"/>
+            <a:ext cx="10030968" cy="3154680"/>
           </a:xfrm>
           <a:prstGeom prst="roundRect">
             <a:avLst>
@@ -6473,8 +6512,8 @@
         </p:nvSpPr>
         <p:spPr>
           <a:xfrm>
-            <a:off x="731520" y="1572768"/>
-            <a:ext cx="10725912" cy="2971800"/>
+            <a:off x="1170432" y="1572768"/>
+            <a:ext cx="9848088" cy="2971800"/>
           </a:xfrm>
           <a:prstGeom prst="roundRect">
             <a:avLst>
@@ -6502,7 +6541,7 @@
         </p:nvSpPr>
         <p:spPr>
           <a:xfrm>
-            <a:off x="1097280" y="1810512"/>
+            <a:off x="1536192" y="1810512"/>
             <a:ext cx="457200" cy="628650"/>
           </a:xfrm>
           <a:prstGeom prst="rect">
@@ -6541,8 +6580,8 @@
         </p:nvSpPr>
         <p:spPr>
           <a:xfrm>
-            <a:off x="1645920" y="1810512"/>
-            <a:ext cx="9445752" cy="628650"/>
+            <a:off x="2084832" y="1810512"/>
+            <a:ext cx="8567928" cy="628650"/>
           </a:xfrm>
           <a:prstGeom prst="rect">
             <a:avLst/>
@@ -6594,7 +6633,7 @@
         </p:nvSpPr>
         <p:spPr>
           <a:xfrm>
-            <a:off x="1097280" y="2439162"/>
+            <a:off x="1536192" y="2439162"/>
             <a:ext cx="457200" cy="628650"/>
           </a:xfrm>
           <a:prstGeom prst="rect">
@@ -6633,8 +6672,8 @@
         </p:nvSpPr>
         <p:spPr>
           <a:xfrm>
-            <a:off x="1645920" y="2439162"/>
-            <a:ext cx="9445752" cy="628650"/>
+            <a:off x="2084832" y="2439162"/>
+            <a:ext cx="8567928" cy="628650"/>
           </a:xfrm>
           <a:prstGeom prst="rect">
             <a:avLst/>
@@ -6686,7 +6725,7 @@
         </p:nvSpPr>
         <p:spPr>
           <a:xfrm>
-            <a:off x="1097280" y="3067812"/>
+            <a:off x="1536192" y="3067812"/>
             <a:ext cx="457200" cy="628650"/>
           </a:xfrm>
           <a:prstGeom prst="rect">
@@ -6725,8 +6764,8 @@
         </p:nvSpPr>
         <p:spPr>
           <a:xfrm>
-            <a:off x="1645920" y="3067812"/>
-            <a:ext cx="9445752" cy="628650"/>
+            <a:off x="2084832" y="3067812"/>
+            <a:ext cx="8567928" cy="628650"/>
           </a:xfrm>
           <a:prstGeom prst="rect">
             <a:avLst/>
@@ -6778,7 +6817,7 @@
         </p:nvSpPr>
         <p:spPr>
           <a:xfrm>
-            <a:off x="1097280" y="3696462"/>
+            <a:off x="1536192" y="3696462"/>
             <a:ext cx="457200" cy="628650"/>
           </a:xfrm>
           <a:prstGeom prst="rect">
@@ -6817,8 +6856,8 @@
         </p:nvSpPr>
         <p:spPr>
           <a:xfrm>
-            <a:off x="1645920" y="3696462"/>
-            <a:ext cx="9445752" cy="628650"/>
+            <a:off x="2084832" y="3696462"/>
+            <a:ext cx="8567928" cy="628650"/>
           </a:xfrm>
           <a:prstGeom prst="rect">
             <a:avLst/>
@@ -6948,8 +6987,8 @@
         </p:nvSpPr>
         <p:spPr>
           <a:xfrm>
-            <a:off x="640080" y="1463040"/>
-            <a:ext cx="5285232" cy="3200400"/>
+            <a:off x="1078992" y="1463040"/>
+            <a:ext cx="4860036" cy="3200400"/>
           </a:xfrm>
           <a:prstGeom prst="roundRect">
             <a:avLst>
@@ -6984,8 +7023,8 @@
         </p:nvSpPr>
         <p:spPr>
           <a:xfrm>
-            <a:off x="731520" y="1554480"/>
-            <a:ext cx="5102352" cy="3017520"/>
+            <a:off x="1170432" y="1554480"/>
+            <a:ext cx="4677156" cy="3017520"/>
           </a:xfrm>
           <a:prstGeom prst="roundRect">
             <a:avLst>
@@ -7013,8 +7052,8 @@
         </p:nvSpPr>
         <p:spPr>
           <a:xfrm>
-            <a:off x="1005840" y="1609344"/>
-            <a:ext cx="4572000" cy="411480"/>
+            <a:off x="1444752" y="1609344"/>
+            <a:ext cx="4128516" cy="411480"/>
           </a:xfrm>
           <a:prstGeom prst="rect">
             <a:avLst/>
@@ -7052,7 +7091,7 @@
         </p:nvSpPr>
         <p:spPr>
           <a:xfrm rot="2700000">
-            <a:off x="1051560" y="2295144"/>
+            <a:off x="1472184" y="2295144"/>
             <a:ext cx="128016" cy="128016"/>
           </a:xfrm>
           <a:prstGeom prst="rect">
@@ -7077,8 +7116,8 @@
         </p:nvSpPr>
         <p:spPr>
           <a:xfrm>
-            <a:off x="1335024" y="2121408"/>
-            <a:ext cx="4389120" cy="475488"/>
+            <a:off x="1755648" y="2121408"/>
+            <a:ext cx="3945636" cy="475488"/>
           </a:xfrm>
           <a:prstGeom prst="rect">
             <a:avLst/>
@@ -7094,7 +7133,7 @@
               <a:buNone/>
             </a:pPr>
             <a:r>
-              <a:rPr lang="en-US" sz="1450" b="1" dirty="0">
+              <a:rPr lang="en-US" sz="1400" b="1" dirty="0">
                 <a:solidFill>
                   <a:srgbClr val="1E5631"/>
                 </a:solidFill>
@@ -7108,7 +7147,7 @@
               <a:buNone/>
             </a:pPr>
             <a:r>
-              <a:rPr lang="en-US" sz="1450" dirty="0">
+              <a:rPr lang="en-US" sz="1400" dirty="0">
                 <a:solidFill>
                   <a:srgbClr val="33240F"/>
                 </a:solidFill>
@@ -7118,7 +7157,7 @@
               </a:rPr>
               <a:t> — the shared life of love in the early Church</a:t>
             </a:r>
-            <a:endParaRPr lang="en-US" sz="1450" dirty="0"/>
+            <a:endParaRPr lang="en-US" sz="1400" dirty="0"/>
           </a:p>
         </p:txBody>
       </p:sp>
@@ -7130,7 +7169,7 @@
         </p:nvSpPr>
         <p:spPr>
           <a:xfrm rot="2700000">
-            <a:off x="1051560" y="2770632"/>
+            <a:off x="1472184" y="2770632"/>
             <a:ext cx="128016" cy="128016"/>
           </a:xfrm>
           <a:prstGeom prst="rect">
@@ -7155,8 +7194,8 @@
         </p:nvSpPr>
         <p:spPr>
           <a:xfrm>
-            <a:off x="1335024" y="2596896"/>
-            <a:ext cx="4389120" cy="475488"/>
+            <a:off x="1755648" y="2596896"/>
+            <a:ext cx="3945636" cy="475488"/>
           </a:xfrm>
           <a:prstGeom prst="rect">
             <a:avLst/>
@@ -7172,7 +7211,7 @@
               <a:buNone/>
             </a:pPr>
             <a:r>
-              <a:rPr lang="en-US" sz="1450" b="1" dirty="0">
+              <a:rPr lang="en-US" sz="1400" b="1" dirty="0">
                 <a:solidFill>
                   <a:srgbClr val="8B1A1A"/>
                 </a:solidFill>
@@ -7186,7 +7225,7 @@
               <a:buNone/>
             </a:pPr>
             <a:r>
-              <a:rPr lang="en-US" sz="1450" dirty="0">
+              <a:rPr lang="en-US" sz="1400" dirty="0">
                 <a:solidFill>
                   <a:srgbClr val="33240F"/>
                 </a:solidFill>
@@ -7196,7 +7235,7 @@
               </a:rPr>
               <a:t> — a holy mask over an unholy heart</a:t>
             </a:r>
-            <a:endParaRPr lang="en-US" sz="1450" dirty="0"/>
+            <a:endParaRPr lang="en-US" sz="1400" dirty="0"/>
           </a:p>
         </p:txBody>
       </p:sp>
@@ -7208,7 +7247,7 @@
         </p:nvSpPr>
         <p:spPr>
           <a:xfrm rot="2700000">
-            <a:off x="1051560" y="3246120"/>
+            <a:off x="1472184" y="3246120"/>
             <a:ext cx="128016" cy="128016"/>
           </a:xfrm>
           <a:prstGeom prst="rect">
@@ -7233,8 +7272,8 @@
         </p:nvSpPr>
         <p:spPr>
           <a:xfrm>
-            <a:off x="1335024" y="3072384"/>
-            <a:ext cx="4389120" cy="475488"/>
+            <a:off x="1755648" y="3072384"/>
+            <a:ext cx="3945636" cy="475488"/>
           </a:xfrm>
           <a:prstGeom prst="rect">
             <a:avLst/>
@@ -7250,7 +7289,7 @@
               <a:buNone/>
             </a:pPr>
             <a:r>
-              <a:rPr lang="en-US" sz="1450" b="1" dirty="0">
+              <a:rPr lang="en-US" sz="1400" b="1" dirty="0">
                 <a:solidFill>
                   <a:srgbClr val="8B1A1A"/>
                 </a:solidFill>
@@ -7264,7 +7303,7 @@
               <a:buNone/>
             </a:pPr>
             <a:r>
-              <a:rPr lang="en-US" sz="1450" dirty="0">
+              <a:rPr lang="en-US" sz="1400" dirty="0">
                 <a:solidFill>
                   <a:srgbClr val="33240F"/>
                 </a:solidFill>
@@ -7274,7 +7313,7 @@
               </a:rPr>
               <a:t> — the hunger to be seen and praised</a:t>
             </a:r>
-            <a:endParaRPr lang="en-US" sz="1450" dirty="0"/>
+            <a:endParaRPr lang="en-US" sz="1400" dirty="0"/>
           </a:p>
         </p:txBody>
       </p:sp>
@@ -7286,7 +7325,7 @@
         </p:nvSpPr>
         <p:spPr>
           <a:xfrm rot="2700000">
-            <a:off x="1051560" y="3721608"/>
+            <a:off x="1472184" y="3721608"/>
             <a:ext cx="128016" cy="128016"/>
           </a:xfrm>
           <a:prstGeom prst="rect">
@@ -7311,8 +7350,8 @@
         </p:nvSpPr>
         <p:spPr>
           <a:xfrm>
-            <a:off x="1335024" y="3547872"/>
-            <a:ext cx="4389120" cy="475488"/>
+            <a:off x="1755648" y="3547872"/>
+            <a:ext cx="3945636" cy="475488"/>
           </a:xfrm>
           <a:prstGeom prst="rect">
             <a:avLst/>
@@ -7328,7 +7367,7 @@
               <a:buNone/>
             </a:pPr>
             <a:r>
-              <a:rPr lang="en-US" sz="1450" b="1" dirty="0">
+              <a:rPr lang="en-US" sz="1400" b="1" dirty="0">
                 <a:solidFill>
                   <a:srgbClr val="1E5631"/>
                 </a:solidFill>
@@ -7342,7 +7381,7 @@
               <a:buNone/>
             </a:pPr>
             <a:r>
-              <a:rPr lang="en-US" sz="1450" dirty="0">
+              <a:rPr lang="en-US" sz="1400" dirty="0">
                 <a:solidFill>
                   <a:srgbClr val="33240F"/>
                 </a:solidFill>
@@ -7352,7 +7391,7 @@
               </a:rPr>
               <a:t> — reverent awe; the beginning of wisdom</a:t>
             </a:r>
-            <a:endParaRPr lang="en-US" sz="1450" dirty="0"/>
+            <a:endParaRPr lang="en-US" sz="1400" dirty="0"/>
           </a:p>
         </p:txBody>
       </p:sp>
@@ -7364,7 +7403,7 @@
         </p:nvSpPr>
         <p:spPr>
           <a:xfrm rot="2700000">
-            <a:off x="1051560" y="4197096"/>
+            <a:off x="1472184" y="4197096"/>
             <a:ext cx="128016" cy="128016"/>
           </a:xfrm>
           <a:prstGeom prst="rect">
@@ -7389,8 +7428,8 @@
         </p:nvSpPr>
         <p:spPr>
           <a:xfrm>
-            <a:off x="1335024" y="4023360"/>
-            <a:ext cx="4389120" cy="475488"/>
+            <a:off x="1755648" y="4023360"/>
+            <a:ext cx="3945636" cy="475488"/>
           </a:xfrm>
           <a:prstGeom prst="rect">
             <a:avLst/>
@@ -7406,7 +7445,7 @@
               <a:buNone/>
             </a:pPr>
             <a:r>
-              <a:rPr lang="en-US" sz="1450" b="1" dirty="0">
+              <a:rPr lang="en-US" sz="1400" b="1" dirty="0">
                 <a:solidFill>
                   <a:srgbClr val="8B1A1A"/>
                 </a:solidFill>
@@ -7420,7 +7459,7 @@
               <a:buNone/>
             </a:pPr>
             <a:r>
-              <a:rPr lang="en-US" sz="1450" dirty="0">
+              <a:rPr lang="en-US" sz="1400" dirty="0">
                 <a:solidFill>
                   <a:srgbClr val="33240F"/>
                 </a:solidFill>
@@ -7430,7 +7469,7 @@
               </a:rPr>
               <a:t> — the Third Person of the Trinity, true God</a:t>
             </a:r>
-            <a:endParaRPr lang="en-US" sz="1450" dirty="0"/>
+            <a:endParaRPr lang="en-US" sz="1400" dirty="0"/>
           </a:p>
         </p:txBody>
       </p:sp>
@@ -7442,8 +7481,8 @@
         </p:nvSpPr>
         <p:spPr>
           <a:xfrm>
-            <a:off x="6263640" y="1463040"/>
-            <a:ext cx="5285232" cy="3200400"/>
+            <a:off x="6249924" y="1463040"/>
+            <a:ext cx="4860036" cy="3200400"/>
           </a:xfrm>
           <a:prstGeom prst="roundRect">
             <a:avLst>
@@ -7478,8 +7517,8 @@
         </p:nvSpPr>
         <p:spPr>
           <a:xfrm>
-            <a:off x="6355080" y="1554480"/>
-            <a:ext cx="5102352" cy="3017520"/>
+            <a:off x="6341364" y="1554480"/>
+            <a:ext cx="4677156" cy="3017520"/>
           </a:xfrm>
           <a:prstGeom prst="roundRect">
             <a:avLst>
@@ -7507,8 +7546,8 @@
         </p:nvSpPr>
         <p:spPr>
           <a:xfrm>
-            <a:off x="6629400" y="1609344"/>
-            <a:ext cx="4572000" cy="411480"/>
+            <a:off x="6615684" y="1609344"/>
+            <a:ext cx="4128516" cy="411480"/>
           </a:xfrm>
           <a:prstGeom prst="rect">
             <a:avLst/>
@@ -7546,7 +7585,7 @@
         </p:nvSpPr>
         <p:spPr>
           <a:xfrm rot="2700000">
-            <a:off x="6675120" y="2258568"/>
+            <a:off x="6643116" y="2258568"/>
             <a:ext cx="128016" cy="128016"/>
           </a:xfrm>
           <a:prstGeom prst="rect">
@@ -7571,8 +7610,8 @@
         </p:nvSpPr>
         <p:spPr>
           <a:xfrm>
-            <a:off x="6967728" y="2121408"/>
-            <a:ext cx="4370832" cy="457200"/>
+            <a:off x="6926580" y="2121408"/>
+            <a:ext cx="3945636" cy="457200"/>
           </a:xfrm>
           <a:prstGeom prst="rect">
             <a:avLst/>
@@ -7588,7 +7627,7 @@
               <a:buNone/>
             </a:pPr>
             <a:r>
-              <a:rPr lang="en-US" sz="1350" dirty="0">
+              <a:rPr lang="en-US" sz="1300" dirty="0">
                 <a:solidFill>
                   <a:srgbClr val="33240F"/>
                 </a:solidFill>
@@ -7598,7 +7637,7 @@
               </a:rPr>
               <a:t>Holy Scripture, Acts 4–5 (Orthodox Study Bible)</a:t>
             </a:r>
-            <a:endParaRPr lang="en-US" sz="1350" dirty="0"/>
+            <a:endParaRPr lang="en-US" sz="1300" dirty="0"/>
           </a:p>
         </p:txBody>
       </p:sp>
@@ -7610,7 +7649,7 @@
         </p:nvSpPr>
         <p:spPr>
           <a:xfrm rot="2700000">
-            <a:off x="6675120" y="2715768"/>
+            <a:off x="6643116" y="2715768"/>
             <a:ext cx="128016" cy="128016"/>
           </a:xfrm>
           <a:prstGeom prst="rect">
@@ -7635,8 +7674,8 @@
         </p:nvSpPr>
         <p:spPr>
           <a:xfrm>
-            <a:off x="6967728" y="2578608"/>
-            <a:ext cx="4370832" cy="868680"/>
+            <a:off x="6926580" y="2578608"/>
+            <a:ext cx="3945636" cy="914400"/>
           </a:xfrm>
           <a:prstGeom prst="rect">
             <a:avLst/>
@@ -7652,7 +7691,7 @@
               <a:buNone/>
             </a:pPr>
             <a:r>
-              <a:rPr lang="en-US" sz="1350" dirty="0">
+              <a:rPr lang="en-US" sz="1300" dirty="0">
                 <a:solidFill>
                   <a:srgbClr val="33240F"/>
                 </a:solidFill>
@@ -7662,7 +7701,7 @@
               </a:rPr>
               <a:t>Kesis Solomon Mulugeta Zewde (PhD), Sunday School Curriculum, Level V — Debre Nazareth St. Mary &amp; St. Gabriel EOTC, St. Louis — Week 39</a:t>
             </a:r>
-            <a:endParaRPr lang="en-US" sz="1350" dirty="0"/>
+            <a:endParaRPr lang="en-US" sz="1300" dirty="0"/>
           </a:p>
         </p:txBody>
       </p:sp>
@@ -7674,7 +7713,7 @@
         </p:nvSpPr>
         <p:spPr>
           <a:xfrm rot="2700000">
-            <a:off x="6675120" y="3584448"/>
+            <a:off x="6643116" y="3630168"/>
             <a:ext cx="128016" cy="128016"/>
           </a:xfrm>
           <a:prstGeom prst="rect">
@@ -7699,8 +7738,8 @@
         </p:nvSpPr>
         <p:spPr>
           <a:xfrm>
-            <a:off x="6967728" y="3447288"/>
-            <a:ext cx="4370832" cy="685800"/>
+            <a:off x="6926580" y="3493008"/>
+            <a:ext cx="3945636" cy="685800"/>
           </a:xfrm>
           <a:prstGeom prst="rect">
             <a:avLst/>
@@ -7716,7 +7755,7 @@
               <a:buNone/>
             </a:pPr>
             <a:r>
-              <a:rPr lang="en-US" sz="1350" dirty="0">
+              <a:rPr lang="en-US" sz="1300" dirty="0">
                 <a:solidFill>
                   <a:srgbClr val="33240F"/>
                 </a:solidFill>
@@ -7726,7 +7765,7 @@
               </a:rPr>
               <a:t>In-depth reading by Dn Yonnas, in the faith of the Ethiopian Orthodox Tewahedo Church</a:t>
             </a:r>
-            <a:endParaRPr lang="en-US" sz="1350" dirty="0"/>
+            <a:endParaRPr lang="en-US" sz="1300" dirty="0"/>
           </a:p>
         </p:txBody>
       </p:sp>
@@ -7738,8 +7777,8 @@
         </p:nvSpPr>
         <p:spPr>
           <a:xfrm>
-            <a:off x="6629400" y="4114800"/>
-            <a:ext cx="4846320" cy="502920"/>
+            <a:off x="6615684" y="4160520"/>
+            <a:ext cx="4128516" cy="457200"/>
           </a:xfrm>
           <a:prstGeom prst="rect">
             <a:avLst/>
@@ -7755,7 +7794,7 @@
               <a:buNone/>
             </a:pPr>
             <a:r>
-              <a:rPr lang="en-US" sz="1300" i="1" dirty="0">
+              <a:rPr lang="en-US" sz="1250" i="1" dirty="0">
                 <a:solidFill>
                   <a:srgbClr val="8B1A1A"/>
                 </a:solidFill>
@@ -7765,7 +7804,7 @@
               </a:rPr>
               <a:t>Doctrinal questions, and any question about their souls, belong to your father confessor or parish priest.</a:t>
             </a:r>
-            <a:endParaRPr lang="en-US" sz="1300" dirty="0"/>
+            <a:endParaRPr lang="en-US" sz="1250" dirty="0"/>
           </a:p>
         </p:txBody>
       </p:sp>
@@ -7855,8 +7894,8 @@
         </p:nvSpPr>
         <p:spPr>
           <a:xfrm>
-            <a:off x="640080" y="1572768"/>
-            <a:ext cx="10908792" cy="2971800"/>
+            <a:off x="1078992" y="1572768"/>
+            <a:ext cx="10030968" cy="2971800"/>
           </a:xfrm>
           <a:prstGeom prst="roundRect">
             <a:avLst>
@@ -7891,8 +7930,8 @@
         </p:nvSpPr>
         <p:spPr>
           <a:xfrm>
-            <a:off x="731520" y="1664208"/>
-            <a:ext cx="10725912" cy="2788920"/>
+            <a:off x="1170432" y="1664208"/>
+            <a:ext cx="9848088" cy="2788920"/>
           </a:xfrm>
           <a:prstGeom prst="roundRect">
             <a:avLst>
@@ -7920,7 +7959,7 @@
         </p:nvSpPr>
         <p:spPr>
           <a:xfrm rot="2700000">
-            <a:off x="978408" y="2090547"/>
+            <a:off x="1417320" y="2090547"/>
             <a:ext cx="146304" cy="146304"/>
           </a:xfrm>
           <a:prstGeom prst="rect">
@@ -7945,8 +7984,8 @@
         </p:nvSpPr>
         <p:spPr>
           <a:xfrm>
-            <a:off x="1389888" y="1865376"/>
-            <a:ext cx="9811512" cy="596646"/>
+            <a:off x="1828800" y="1865376"/>
+            <a:ext cx="8933688" cy="596646"/>
           </a:xfrm>
           <a:prstGeom prst="rect">
             <a:avLst/>
@@ -7998,7 +8037,7 @@
         </p:nvSpPr>
         <p:spPr>
           <a:xfrm rot="2700000">
-            <a:off x="978408" y="2687193"/>
+            <a:off x="1417320" y="2687193"/>
             <a:ext cx="146304" cy="146304"/>
           </a:xfrm>
           <a:prstGeom prst="rect">
@@ -8023,8 +8062,8 @@
         </p:nvSpPr>
         <p:spPr>
           <a:xfrm>
-            <a:off x="1389888" y="2462022"/>
-            <a:ext cx="9811512" cy="596646"/>
+            <a:off x="1828800" y="2462022"/>
+            <a:ext cx="8933688" cy="596646"/>
           </a:xfrm>
           <a:prstGeom prst="rect">
             <a:avLst/>
@@ -8118,7 +8157,7 @@
         </p:nvSpPr>
         <p:spPr>
           <a:xfrm rot="2700000">
-            <a:off x="978408" y="3283839"/>
+            <a:off x="1417320" y="3283839"/>
             <a:ext cx="146304" cy="146304"/>
           </a:xfrm>
           <a:prstGeom prst="rect">
@@ -8143,8 +8182,8 @@
         </p:nvSpPr>
         <p:spPr>
           <a:xfrm>
-            <a:off x="1389888" y="3058668"/>
-            <a:ext cx="9811512" cy="596646"/>
+            <a:off x="1828800" y="3058668"/>
+            <a:ext cx="8933688" cy="596646"/>
           </a:xfrm>
           <a:prstGeom prst="rect">
             <a:avLst/>
@@ -8196,7 +8235,7 @@
         </p:nvSpPr>
         <p:spPr>
           <a:xfrm rot="2700000">
-            <a:off x="978408" y="3880485"/>
+            <a:off x="1417320" y="3880485"/>
             <a:ext cx="146304" cy="146304"/>
           </a:xfrm>
           <a:prstGeom prst="rect">
@@ -8221,8 +8260,8 @@
         </p:nvSpPr>
         <p:spPr>
           <a:xfrm>
-            <a:off x="1389888" y="3655314"/>
-            <a:ext cx="9811512" cy="596646"/>
+            <a:off x="1828800" y="3655314"/>
+            <a:ext cx="8933688" cy="596646"/>
           </a:xfrm>
           <a:prstGeom prst="rect">
             <a:avLst/>
@@ -8408,8 +8447,8 @@
         </p:nvSpPr>
         <p:spPr>
           <a:xfrm>
-            <a:off x="640080" y="1508760"/>
-            <a:ext cx="10908792" cy="1783080"/>
+            <a:off x="1078992" y="1508760"/>
+            <a:ext cx="10030968" cy="1783080"/>
           </a:xfrm>
           <a:prstGeom prst="roundRect">
             <a:avLst>
@@ -8444,8 +8483,8 @@
         </p:nvSpPr>
         <p:spPr>
           <a:xfrm>
-            <a:off x="731520" y="1600200"/>
-            <a:ext cx="10725912" cy="1600200"/>
+            <a:off x="1170432" y="1600200"/>
+            <a:ext cx="9848088" cy="1600200"/>
           </a:xfrm>
           <a:prstGeom prst="roundRect">
             <a:avLst>
@@ -8473,7 +8512,7 @@
         </p:nvSpPr>
         <p:spPr>
           <a:xfrm rot="2700000">
-            <a:off x="978408" y="1927860"/>
+            <a:off x="1417320" y="1927860"/>
             <a:ext cx="146304" cy="146304"/>
           </a:xfrm>
           <a:prstGeom prst="rect">
@@ -8498,8 +8537,8 @@
         </p:nvSpPr>
         <p:spPr>
           <a:xfrm>
-            <a:off x="1389888" y="1801368"/>
-            <a:ext cx="9811512" cy="399288"/>
+            <a:off x="1828800" y="1801368"/>
+            <a:ext cx="8933688" cy="399288"/>
           </a:xfrm>
           <a:prstGeom prst="rect">
             <a:avLst/>
@@ -8551,7 +8590,7 @@
         </p:nvSpPr>
         <p:spPr>
           <a:xfrm rot="2700000">
-            <a:off x="978408" y="2327148"/>
+            <a:off x="1417320" y="2327148"/>
             <a:ext cx="146304" cy="146304"/>
           </a:xfrm>
           <a:prstGeom prst="rect">
@@ -8576,8 +8615,8 @@
         </p:nvSpPr>
         <p:spPr>
           <a:xfrm>
-            <a:off x="1389888" y="2200656"/>
-            <a:ext cx="9811512" cy="399288"/>
+            <a:off x="1828800" y="2200656"/>
+            <a:ext cx="8933688" cy="399288"/>
           </a:xfrm>
           <a:prstGeom prst="rect">
             <a:avLst/>
@@ -8671,7 +8710,7 @@
         </p:nvSpPr>
         <p:spPr>
           <a:xfrm rot="2700000">
-            <a:off x="978408" y="2726436"/>
+            <a:off x="1417320" y="2726436"/>
             <a:ext cx="146304" cy="146304"/>
           </a:xfrm>
           <a:prstGeom prst="rect">
@@ -8696,8 +8735,8 @@
         </p:nvSpPr>
         <p:spPr>
           <a:xfrm>
-            <a:off x="1389888" y="2599944"/>
-            <a:ext cx="9811512" cy="399288"/>
+            <a:off x="1828800" y="2599944"/>
+            <a:ext cx="8933688" cy="399288"/>
           </a:xfrm>
           <a:prstGeom prst="rect">
             <a:avLst/>
@@ -8763,8 +8802,8 @@
         </p:nvSpPr>
         <p:spPr>
           <a:xfrm>
-            <a:off x="914400" y="3474720"/>
-            <a:ext cx="10360152" cy="1005840"/>
+            <a:off x="1353312" y="3474720"/>
+            <a:ext cx="9482328" cy="1005840"/>
           </a:xfrm>
           <a:prstGeom prst="roundRect">
             <a:avLst>
@@ -8799,8 +8838,8 @@
         </p:nvSpPr>
         <p:spPr>
           <a:xfrm>
-            <a:off x="1005840" y="3566160"/>
-            <a:ext cx="10177272" cy="822960"/>
+            <a:off x="1444752" y="3566160"/>
+            <a:ext cx="9299448" cy="822960"/>
           </a:xfrm>
           <a:prstGeom prst="roundRect">
             <a:avLst>
@@ -8828,8 +8867,8 @@
         </p:nvSpPr>
         <p:spPr>
           <a:xfrm>
-            <a:off x="1280160" y="3621024"/>
-            <a:ext cx="9628632" cy="713232"/>
+            <a:off x="1719072" y="3621024"/>
+            <a:ext cx="8750808" cy="713232"/>
           </a:xfrm>
           <a:prstGeom prst="rect">
             <a:avLst/>
@@ -8965,8 +9004,8 @@
         </p:nvSpPr>
         <p:spPr>
           <a:xfrm>
-            <a:off x="640080" y="1463040"/>
-            <a:ext cx="10908792" cy="3154680"/>
+            <a:off x="1078992" y="1463040"/>
+            <a:ext cx="10030968" cy="3154680"/>
           </a:xfrm>
           <a:prstGeom prst="roundRect">
             <a:avLst>
@@ -9001,8 +9040,8 @@
         </p:nvSpPr>
         <p:spPr>
           <a:xfrm>
-            <a:off x="731520" y="1554480"/>
-            <a:ext cx="10725912" cy="2971800"/>
+            <a:off x="1170432" y="1554480"/>
+            <a:ext cx="9848088" cy="2971800"/>
           </a:xfrm>
           <a:prstGeom prst="roundRect">
             <a:avLst>
@@ -9030,7 +9069,7 @@
         </p:nvSpPr>
         <p:spPr>
           <a:xfrm rot="2700000">
-            <a:off x="978408" y="1939442"/>
+            <a:off x="1417320" y="1939442"/>
             <a:ext cx="146304" cy="146304"/>
           </a:xfrm>
           <a:prstGeom prst="rect">
@@ -9055,8 +9094,8 @@
         </p:nvSpPr>
         <p:spPr>
           <a:xfrm>
-            <a:off x="1389888" y="1755648"/>
-            <a:ext cx="9811512" cy="513893"/>
+            <a:off x="1828800" y="1755648"/>
+            <a:ext cx="8933688" cy="513893"/>
           </a:xfrm>
           <a:prstGeom prst="rect">
             <a:avLst/>
@@ -9164,7 +9203,7 @@
         </p:nvSpPr>
         <p:spPr>
           <a:xfrm rot="2700000">
-            <a:off x="978408" y="2453335"/>
+            <a:off x="1417320" y="2453335"/>
             <a:ext cx="146304" cy="146304"/>
           </a:xfrm>
           <a:prstGeom prst="rect">
@@ -9189,8 +9228,8 @@
         </p:nvSpPr>
         <p:spPr>
           <a:xfrm>
-            <a:off x="1389888" y="2269541"/>
-            <a:ext cx="9811512" cy="513893"/>
+            <a:off x="1828800" y="2269541"/>
+            <a:ext cx="8933688" cy="513893"/>
           </a:xfrm>
           <a:prstGeom prst="rect">
             <a:avLst/>
@@ -9270,7 +9309,7 @@
         </p:nvSpPr>
         <p:spPr>
           <a:xfrm rot="2700000">
-            <a:off x="978408" y="2967228"/>
+            <a:off x="1417320" y="2967228"/>
             <a:ext cx="146304" cy="146304"/>
           </a:xfrm>
           <a:prstGeom prst="rect">
@@ -9295,8 +9334,8 @@
         </p:nvSpPr>
         <p:spPr>
           <a:xfrm>
-            <a:off x="1389888" y="2783434"/>
-            <a:ext cx="9811512" cy="513893"/>
+            <a:off x="1828800" y="2783434"/>
+            <a:ext cx="8933688" cy="513893"/>
           </a:xfrm>
           <a:prstGeom prst="rect">
             <a:avLst/>
@@ -9376,7 +9415,7 @@
         </p:nvSpPr>
         <p:spPr>
           <a:xfrm rot="2700000">
-            <a:off x="978408" y="3481121"/>
+            <a:off x="1417320" y="3481121"/>
             <a:ext cx="146304" cy="146304"/>
           </a:xfrm>
           <a:prstGeom prst="rect">
@@ -9401,8 +9440,8 @@
         </p:nvSpPr>
         <p:spPr>
           <a:xfrm>
-            <a:off x="1389888" y="3297326"/>
-            <a:ext cx="9811512" cy="513893"/>
+            <a:off x="1828800" y="3297326"/>
+            <a:ext cx="8933688" cy="513893"/>
           </a:xfrm>
           <a:prstGeom prst="rect">
             <a:avLst/>
@@ -9482,7 +9521,7 @@
         </p:nvSpPr>
         <p:spPr>
           <a:xfrm rot="2700000">
-            <a:off x="978408" y="3995014"/>
+            <a:off x="1417320" y="3995014"/>
             <a:ext cx="146304" cy="146304"/>
           </a:xfrm>
           <a:prstGeom prst="rect">
@@ -9507,8 +9546,8 @@
         </p:nvSpPr>
         <p:spPr>
           <a:xfrm>
-            <a:off x="1389888" y="3811219"/>
-            <a:ext cx="9811512" cy="513893"/>
+            <a:off x="1828800" y="3811219"/>
+            <a:ext cx="8933688" cy="513893"/>
           </a:xfrm>
           <a:prstGeom prst="rect">
             <a:avLst/>
@@ -9666,8 +9705,8 @@
         </p:nvSpPr>
         <p:spPr>
           <a:xfrm>
-            <a:off x="640080" y="1463040"/>
-            <a:ext cx="10908792" cy="3154680"/>
+            <a:off x="1078992" y="1463040"/>
+            <a:ext cx="10030968" cy="3154680"/>
           </a:xfrm>
           <a:prstGeom prst="roundRect">
             <a:avLst>
@@ -9702,8 +9741,8 @@
         </p:nvSpPr>
         <p:spPr>
           <a:xfrm>
-            <a:off x="731520" y="1554480"/>
-            <a:ext cx="10725912" cy="2971800"/>
+            <a:off x="1170432" y="1554480"/>
+            <a:ext cx="9848088" cy="2971800"/>
           </a:xfrm>
           <a:prstGeom prst="roundRect">
             <a:avLst>
@@ -9731,7 +9770,7 @@
         </p:nvSpPr>
         <p:spPr>
           <a:xfrm rot="2700000">
-            <a:off x="978408" y="1939442"/>
+            <a:off x="1417320" y="1939442"/>
             <a:ext cx="146304" cy="146304"/>
           </a:xfrm>
           <a:prstGeom prst="rect">
@@ -9756,8 +9795,8 @@
         </p:nvSpPr>
         <p:spPr>
           <a:xfrm>
-            <a:off x="1389888" y="1755648"/>
-            <a:ext cx="9811512" cy="513893"/>
+            <a:off x="1828800" y="1755648"/>
+            <a:ext cx="8933688" cy="513893"/>
           </a:xfrm>
           <a:prstGeom prst="rect">
             <a:avLst/>
@@ -9823,7 +9862,7 @@
         </p:nvSpPr>
         <p:spPr>
           <a:xfrm rot="2700000">
-            <a:off x="978408" y="2453335"/>
+            <a:off x="1417320" y="2453335"/>
             <a:ext cx="146304" cy="146304"/>
           </a:xfrm>
           <a:prstGeom prst="rect">
@@ -9848,8 +9887,8 @@
         </p:nvSpPr>
         <p:spPr>
           <a:xfrm>
-            <a:off x="1389888" y="2269541"/>
-            <a:ext cx="9811512" cy="513893"/>
+            <a:off x="1828800" y="2269541"/>
+            <a:ext cx="8933688" cy="513893"/>
           </a:xfrm>
           <a:prstGeom prst="rect">
             <a:avLst/>
@@ -9915,7 +9954,7 @@
         </p:nvSpPr>
         <p:spPr>
           <a:xfrm rot="2700000">
-            <a:off x="978408" y="2967228"/>
+            <a:off x="1417320" y="2967228"/>
             <a:ext cx="146304" cy="146304"/>
           </a:xfrm>
           <a:prstGeom prst="rect">
@@ -9940,8 +9979,8 @@
         </p:nvSpPr>
         <p:spPr>
           <a:xfrm>
-            <a:off x="1389888" y="2783434"/>
-            <a:ext cx="9811512" cy="513893"/>
+            <a:off x="1828800" y="2783434"/>
+            <a:ext cx="8933688" cy="513893"/>
           </a:xfrm>
           <a:prstGeom prst="rect">
             <a:avLst/>
@@ -9993,7 +10032,7 @@
         </p:nvSpPr>
         <p:spPr>
           <a:xfrm rot="2700000">
-            <a:off x="978408" y="3481121"/>
+            <a:off x="1417320" y="3481121"/>
             <a:ext cx="146304" cy="146304"/>
           </a:xfrm>
           <a:prstGeom prst="rect">
@@ -10018,8 +10057,8 @@
         </p:nvSpPr>
         <p:spPr>
           <a:xfrm>
-            <a:off x="1389888" y="3297326"/>
-            <a:ext cx="9811512" cy="513893"/>
+            <a:off x="1828800" y="3297326"/>
+            <a:ext cx="8933688" cy="513893"/>
           </a:xfrm>
           <a:prstGeom prst="rect">
             <a:avLst/>
@@ -10099,7 +10138,7 @@
         </p:nvSpPr>
         <p:spPr>
           <a:xfrm rot="2700000">
-            <a:off x="978408" y="3995014"/>
+            <a:off x="1417320" y="3995014"/>
             <a:ext cx="146304" cy="146304"/>
           </a:xfrm>
           <a:prstGeom prst="rect">
@@ -10124,8 +10163,8 @@
         </p:nvSpPr>
         <p:spPr>
           <a:xfrm>
-            <a:off x="1389888" y="3811219"/>
-            <a:ext cx="9811512" cy="513893"/>
+            <a:off x="1828800" y="3811219"/>
+            <a:ext cx="8933688" cy="513893"/>
           </a:xfrm>
           <a:prstGeom prst="rect">
             <a:avLst/>
@@ -10297,8 +10336,8 @@
         </p:nvSpPr>
         <p:spPr>
           <a:xfrm>
-            <a:off x="640080" y="1481328"/>
-            <a:ext cx="10908792" cy="1810512"/>
+            <a:off x="1078992" y="1481328"/>
+            <a:ext cx="10030968" cy="1810512"/>
           </a:xfrm>
           <a:prstGeom prst="roundRect">
             <a:avLst>
@@ -10333,8 +10372,8 @@
         </p:nvSpPr>
         <p:spPr>
           <a:xfrm>
-            <a:off x="731520" y="1572768"/>
-            <a:ext cx="10725912" cy="1627632"/>
+            <a:off x="1170432" y="1572768"/>
+            <a:ext cx="9848088" cy="1627632"/>
           </a:xfrm>
           <a:prstGeom prst="roundRect">
             <a:avLst>
@@ -10362,7 +10401,7 @@
         </p:nvSpPr>
         <p:spPr>
           <a:xfrm rot="2700000">
-            <a:off x="978408" y="1853946"/>
+            <a:off x="1417320" y="1853946"/>
             <a:ext cx="146304" cy="146304"/>
           </a:xfrm>
           <a:prstGeom prst="rect">
@@ -10387,8 +10426,8 @@
         </p:nvSpPr>
         <p:spPr>
           <a:xfrm>
-            <a:off x="1389888" y="1773936"/>
-            <a:ext cx="9811512" cy="306324"/>
+            <a:off x="1828800" y="1773936"/>
+            <a:ext cx="8933688" cy="306324"/>
           </a:xfrm>
           <a:prstGeom prst="rect">
             <a:avLst/>
@@ -10454,7 +10493,7 @@
         </p:nvSpPr>
         <p:spPr>
           <a:xfrm rot="2700000">
-            <a:off x="978408" y="2160270"/>
+            <a:off x="1417320" y="2160270"/>
             <a:ext cx="146304" cy="146304"/>
           </a:xfrm>
           <a:prstGeom prst="rect">
@@ -10479,8 +10518,8 @@
         </p:nvSpPr>
         <p:spPr>
           <a:xfrm>
-            <a:off x="1389888" y="2080260"/>
-            <a:ext cx="9811512" cy="306324"/>
+            <a:off x="1828800" y="2080260"/>
+            <a:ext cx="8933688" cy="306324"/>
           </a:xfrm>
           <a:prstGeom prst="rect">
             <a:avLst/>
@@ -10532,7 +10571,7 @@
         </p:nvSpPr>
         <p:spPr>
           <a:xfrm rot="2700000">
-            <a:off x="978408" y="2466594"/>
+            <a:off x="1417320" y="2466594"/>
             <a:ext cx="146304" cy="146304"/>
           </a:xfrm>
           <a:prstGeom prst="rect">
@@ -10557,8 +10596,8 @@
         </p:nvSpPr>
         <p:spPr>
           <a:xfrm>
-            <a:off x="1389888" y="2386584"/>
-            <a:ext cx="9811512" cy="306324"/>
+            <a:off x="1828800" y="2386584"/>
+            <a:ext cx="8933688" cy="306324"/>
           </a:xfrm>
           <a:prstGeom prst="rect">
             <a:avLst/>
@@ -10624,7 +10663,7 @@
         </p:nvSpPr>
         <p:spPr>
           <a:xfrm rot="2700000">
-            <a:off x="978408" y="2772918"/>
+            <a:off x="1417320" y="2772918"/>
             <a:ext cx="146304" cy="146304"/>
           </a:xfrm>
           <a:prstGeom prst="rect">
@@ -10649,8 +10688,8 @@
         </p:nvSpPr>
         <p:spPr>
           <a:xfrm>
-            <a:off x="1389888" y="2692908"/>
-            <a:ext cx="9811512" cy="306324"/>
+            <a:off x="1828800" y="2692908"/>
+            <a:ext cx="8933688" cy="306324"/>
           </a:xfrm>
           <a:prstGeom prst="rect">
             <a:avLst/>
@@ -10744,8 +10783,8 @@
         </p:nvSpPr>
         <p:spPr>
           <a:xfrm>
-            <a:off x="914400" y="3493008"/>
-            <a:ext cx="10360152" cy="960120"/>
+            <a:off x="1353312" y="3493008"/>
+            <a:ext cx="9482328" cy="960120"/>
           </a:xfrm>
           <a:prstGeom prst="roundRect">
             <a:avLst>
@@ -10780,8 +10819,8 @@
         </p:nvSpPr>
         <p:spPr>
           <a:xfrm>
-            <a:off x="1005840" y="3584448"/>
-            <a:ext cx="10177272" cy="777240"/>
+            <a:off x="1444752" y="3584448"/>
+            <a:ext cx="9299448" cy="777240"/>
           </a:xfrm>
           <a:prstGeom prst="roundRect">
             <a:avLst>
@@ -10809,8 +10848,8 @@
         </p:nvSpPr>
         <p:spPr>
           <a:xfrm>
-            <a:off x="1280160" y="3639312"/>
-            <a:ext cx="9628632" cy="667512"/>
+            <a:off x="1719072" y="3639312"/>
+            <a:ext cx="8750808" cy="667512"/>
           </a:xfrm>
           <a:prstGeom prst="rect">
             <a:avLst/>
@@ -10946,8 +10985,8 @@
         </p:nvSpPr>
         <p:spPr>
           <a:xfrm>
-            <a:off x="914400" y="1371600"/>
-            <a:ext cx="10360152" cy="1143000"/>
+            <a:off x="1353312" y="1371600"/>
+            <a:ext cx="9482328" cy="1143000"/>
           </a:xfrm>
           <a:prstGeom prst="roundRect">
             <a:avLst>
@@ -10982,8 +11021,8 @@
         </p:nvSpPr>
         <p:spPr>
           <a:xfrm>
-            <a:off x="1005840" y="1463040"/>
-            <a:ext cx="10177272" cy="960120"/>
+            <a:off x="1444752" y="1463040"/>
+            <a:ext cx="9299448" cy="960120"/>
           </a:xfrm>
           <a:prstGeom prst="roundRect">
             <a:avLst>
@@ -11011,8 +11050,8 @@
         </p:nvSpPr>
         <p:spPr>
           <a:xfrm>
-            <a:off x="1280160" y="1517904"/>
-            <a:ext cx="9628632" cy="850392"/>
+            <a:off x="1719072" y="1517904"/>
+            <a:ext cx="8750808" cy="850392"/>
           </a:xfrm>
           <a:prstGeom prst="rect">
             <a:avLst/>
@@ -11070,8 +11109,8 @@
         </p:nvSpPr>
         <p:spPr>
           <a:xfrm>
-            <a:off x="640080" y="2670048"/>
-            <a:ext cx="10908792" cy="1874520"/>
+            <a:off x="1078992" y="2670048"/>
+            <a:ext cx="10030968" cy="1874520"/>
           </a:xfrm>
           <a:prstGeom prst="roundRect">
             <a:avLst>
@@ -11106,8 +11145,8 @@
         </p:nvSpPr>
         <p:spPr>
           <a:xfrm>
-            <a:off x="731520" y="2761488"/>
-            <a:ext cx="10725912" cy="1691640"/>
+            <a:off x="1170432" y="2761488"/>
+            <a:ext cx="9848088" cy="1691640"/>
           </a:xfrm>
           <a:prstGeom prst="roundRect">
             <a:avLst>
@@ -11135,7 +11174,7 @@
         </p:nvSpPr>
         <p:spPr>
           <a:xfrm rot="2700000">
-            <a:off x="978408" y="3050667"/>
+            <a:off x="1417320" y="3050667"/>
             <a:ext cx="146304" cy="146304"/>
           </a:xfrm>
           <a:prstGeom prst="rect">
@@ -11160,8 +11199,8 @@
         </p:nvSpPr>
         <p:spPr>
           <a:xfrm>
-            <a:off x="1389888" y="2962656"/>
-            <a:ext cx="9811512" cy="322326"/>
+            <a:off x="1828800" y="2962656"/>
+            <a:ext cx="8933688" cy="322326"/>
           </a:xfrm>
           <a:prstGeom prst="rect">
             <a:avLst/>
@@ -11255,7 +11294,7 @@
         </p:nvSpPr>
         <p:spPr>
           <a:xfrm rot="2700000">
-            <a:off x="978408" y="3372993"/>
+            <a:off x="1417320" y="3372993"/>
             <a:ext cx="146304" cy="146304"/>
           </a:xfrm>
           <a:prstGeom prst="rect">
@@ -11280,8 +11319,8 @@
         </p:nvSpPr>
         <p:spPr>
           <a:xfrm>
-            <a:off x="1389888" y="3284982"/>
-            <a:ext cx="9811512" cy="322326"/>
+            <a:off x="1828800" y="3284982"/>
+            <a:ext cx="8933688" cy="322326"/>
           </a:xfrm>
           <a:prstGeom prst="rect">
             <a:avLst/>
@@ -11347,7 +11386,7 @@
         </p:nvSpPr>
         <p:spPr>
           <a:xfrm rot="2700000">
-            <a:off x="978408" y="3695319"/>
+            <a:off x="1417320" y="3695319"/>
             <a:ext cx="146304" cy="146304"/>
           </a:xfrm>
           <a:prstGeom prst="rect">
@@ -11372,8 +11411,8 @@
         </p:nvSpPr>
         <p:spPr>
           <a:xfrm>
-            <a:off x="1389888" y="3607308"/>
-            <a:ext cx="9811512" cy="322326"/>
+            <a:off x="1828800" y="3607308"/>
+            <a:ext cx="8933688" cy="322326"/>
           </a:xfrm>
           <a:prstGeom prst="rect">
             <a:avLst/>
@@ -11453,7 +11492,7 @@
         </p:nvSpPr>
         <p:spPr>
           <a:xfrm rot="2700000">
-            <a:off x="978408" y="4017645"/>
+            <a:off x="1417320" y="4017645"/>
             <a:ext cx="146304" cy="146304"/>
           </a:xfrm>
           <a:prstGeom prst="rect">
@@ -11478,8 +11517,8 @@
         </p:nvSpPr>
         <p:spPr>
           <a:xfrm>
-            <a:off x="1389888" y="3929634"/>
-            <a:ext cx="9811512" cy="322326"/>
+            <a:off x="1828800" y="3929634"/>
+            <a:ext cx="8933688" cy="322326"/>
           </a:xfrm>
           <a:prstGeom prst="rect">
             <a:avLst/>
@@ -11623,8 +11662,8 @@
         </p:nvSpPr>
         <p:spPr>
           <a:xfrm>
-            <a:off x="640080" y="1463040"/>
-            <a:ext cx="10908792" cy="3154680"/>
+            <a:off x="1078992" y="1463040"/>
+            <a:ext cx="10030968" cy="3154680"/>
           </a:xfrm>
           <a:prstGeom prst="roundRect">
             <a:avLst>
@@ -11659,8 +11698,8 @@
         </p:nvSpPr>
         <p:spPr>
           <a:xfrm>
-            <a:off x="731520" y="1554480"/>
-            <a:ext cx="10725912" cy="2971800"/>
+            <a:off x="1170432" y="1554480"/>
+            <a:ext cx="9848088" cy="2971800"/>
           </a:xfrm>
           <a:prstGeom prst="roundRect">
             <a:avLst>
@@ -11688,7 +11727,7 @@
         </p:nvSpPr>
         <p:spPr>
           <a:xfrm rot="2700000">
-            <a:off x="978408" y="1939442"/>
+            <a:off x="1417320" y="1939442"/>
             <a:ext cx="146304" cy="146304"/>
           </a:xfrm>
           <a:prstGeom prst="rect">
@@ -11713,8 +11752,8 @@
         </p:nvSpPr>
         <p:spPr>
           <a:xfrm>
-            <a:off x="1389888" y="1755648"/>
-            <a:ext cx="9811512" cy="513893"/>
+            <a:off x="1828800" y="1755648"/>
+            <a:ext cx="8933688" cy="513893"/>
           </a:xfrm>
           <a:prstGeom prst="rect">
             <a:avLst/>
@@ -11766,7 +11805,7 @@
         </p:nvSpPr>
         <p:spPr>
           <a:xfrm rot="2700000">
-            <a:off x="978408" y="2453335"/>
+            <a:off x="1417320" y="2453335"/>
             <a:ext cx="146304" cy="146304"/>
           </a:xfrm>
           <a:prstGeom prst="rect">
@@ -11791,8 +11830,8 @@
         </p:nvSpPr>
         <p:spPr>
           <a:xfrm>
-            <a:off x="1389888" y="2269541"/>
-            <a:ext cx="9811512" cy="513893"/>
+            <a:off x="1828800" y="2269541"/>
+            <a:ext cx="8933688" cy="513893"/>
           </a:xfrm>
           <a:prstGeom prst="rect">
             <a:avLst/>
@@ -11844,7 +11883,7 @@
         </p:nvSpPr>
         <p:spPr>
           <a:xfrm rot="2700000">
-            <a:off x="978408" y="2967228"/>
+            <a:off x="1417320" y="2967228"/>
             <a:ext cx="146304" cy="146304"/>
           </a:xfrm>
           <a:prstGeom prst="rect">
@@ -11869,8 +11908,8 @@
         </p:nvSpPr>
         <p:spPr>
           <a:xfrm>
-            <a:off x="1389888" y="2783434"/>
-            <a:ext cx="9811512" cy="513893"/>
+            <a:off x="1828800" y="2783434"/>
+            <a:ext cx="8933688" cy="513893"/>
           </a:xfrm>
           <a:prstGeom prst="rect">
             <a:avLst/>
@@ -11922,7 +11961,7 @@
         </p:nvSpPr>
         <p:spPr>
           <a:xfrm rot="2700000">
-            <a:off x="978408" y="3481121"/>
+            <a:off x="1417320" y="3481121"/>
             <a:ext cx="146304" cy="146304"/>
           </a:xfrm>
           <a:prstGeom prst="rect">
@@ -11947,8 +11986,8 @@
         </p:nvSpPr>
         <p:spPr>
           <a:xfrm>
-            <a:off x="1389888" y="3297326"/>
-            <a:ext cx="9811512" cy="513893"/>
+            <a:off x="1828800" y="3297326"/>
+            <a:ext cx="8933688" cy="513893"/>
           </a:xfrm>
           <a:prstGeom prst="rect">
             <a:avLst/>
@@ -12014,7 +12053,7 @@
         </p:nvSpPr>
         <p:spPr>
           <a:xfrm rot="2700000">
-            <a:off x="978408" y="3995014"/>
+            <a:off x="1417320" y="3995014"/>
             <a:ext cx="146304" cy="146304"/>
           </a:xfrm>
           <a:prstGeom prst="rect">
@@ -12039,8 +12078,8 @@
         </p:nvSpPr>
         <p:spPr>
           <a:xfrm>
-            <a:off x="1389888" y="3811219"/>
-            <a:ext cx="9811512" cy="513893"/>
+            <a:off x="1828800" y="3811219"/>
+            <a:ext cx="8933688" cy="513893"/>
           </a:xfrm>
           <a:prstGeom prst="rect">
             <a:avLst/>
@@ -12198,8 +12237,8 @@
         </p:nvSpPr>
         <p:spPr>
           <a:xfrm>
-            <a:off x="640080" y="1463040"/>
-            <a:ext cx="10908792" cy="3154680"/>
+            <a:off x="1078992" y="1463040"/>
+            <a:ext cx="10030968" cy="3154680"/>
           </a:xfrm>
           <a:prstGeom prst="roundRect">
             <a:avLst>
@@ -12234,8 +12273,8 @@
         </p:nvSpPr>
         <p:spPr>
           <a:xfrm>
-            <a:off x="731520" y="1554480"/>
-            <a:ext cx="10725912" cy="2971800"/>
+            <a:off x="1170432" y="1554480"/>
+            <a:ext cx="9848088" cy="2971800"/>
           </a:xfrm>
           <a:prstGeom prst="roundRect">
             <a:avLst>
@@ -12263,7 +12302,7 @@
         </p:nvSpPr>
         <p:spPr>
           <a:xfrm rot="2700000">
-            <a:off x="978408" y="1939442"/>
+            <a:off x="1417320" y="1939442"/>
             <a:ext cx="146304" cy="146304"/>
           </a:xfrm>
           <a:prstGeom prst="rect">
@@ -12288,8 +12327,8 @@
         </p:nvSpPr>
         <p:spPr>
           <a:xfrm>
-            <a:off x="1389888" y="1755648"/>
-            <a:ext cx="9811512" cy="513893"/>
+            <a:off x="1828800" y="1755648"/>
+            <a:ext cx="8933688" cy="513893"/>
           </a:xfrm>
           <a:prstGeom prst="rect">
             <a:avLst/>
@@ -12355,7 +12394,7 @@
         </p:nvSpPr>
         <p:spPr>
           <a:xfrm rot="2700000">
-            <a:off x="978408" y="2453335"/>
+            <a:off x="1417320" y="2453335"/>
             <a:ext cx="146304" cy="146304"/>
           </a:xfrm>
           <a:prstGeom prst="rect">
@@ -12380,8 +12419,8 @@
         </p:nvSpPr>
         <p:spPr>
           <a:xfrm>
-            <a:off x="1389888" y="2269541"/>
-            <a:ext cx="9811512" cy="513893"/>
+            <a:off x="1828800" y="2269541"/>
+            <a:ext cx="8933688" cy="513893"/>
           </a:xfrm>
           <a:prstGeom prst="rect">
             <a:avLst/>
@@ -12461,7 +12500,7 @@
         </p:nvSpPr>
         <p:spPr>
           <a:xfrm rot="2700000">
-            <a:off x="978408" y="2967228"/>
+            <a:off x="1417320" y="2967228"/>
             <a:ext cx="146304" cy="146304"/>
           </a:xfrm>
           <a:prstGeom prst="rect">
@@ -12486,8 +12525,8 @@
         </p:nvSpPr>
         <p:spPr>
           <a:xfrm>
-            <a:off x="1389888" y="2783434"/>
-            <a:ext cx="9811512" cy="513893"/>
+            <a:off x="1828800" y="2783434"/>
+            <a:ext cx="8933688" cy="513893"/>
           </a:xfrm>
           <a:prstGeom prst="rect">
             <a:avLst/>
@@ -12567,7 +12606,7 @@
         </p:nvSpPr>
         <p:spPr>
           <a:xfrm rot="2700000">
-            <a:off x="978408" y="3481121"/>
+            <a:off x="1417320" y="3481121"/>
             <a:ext cx="146304" cy="146304"/>
           </a:xfrm>
           <a:prstGeom prst="rect">
@@ -12592,8 +12631,8 @@
         </p:nvSpPr>
         <p:spPr>
           <a:xfrm>
-            <a:off x="1389888" y="3297326"/>
-            <a:ext cx="9811512" cy="513893"/>
+            <a:off x="1828800" y="3297326"/>
+            <a:ext cx="8933688" cy="513893"/>
           </a:xfrm>
           <a:prstGeom prst="rect">
             <a:avLst/>
@@ -12659,7 +12698,7 @@
         </p:nvSpPr>
         <p:spPr>
           <a:xfrm rot="2700000">
-            <a:off x="978408" y="3995014"/>
+            <a:off x="1417320" y="3995014"/>
             <a:ext cx="146304" cy="146304"/>
           </a:xfrm>
           <a:prstGeom prst="rect">
@@ -12684,8 +12723,8 @@
         </p:nvSpPr>
         <p:spPr>
           <a:xfrm>
-            <a:off x="1389888" y="3811219"/>
-            <a:ext cx="9811512" cy="513893"/>
+            <a:off x="1828800" y="3811219"/>
+            <a:ext cx="8933688" cy="513893"/>
           </a:xfrm>
           <a:prstGeom prst="rect">
             <a:avLst/>
